--- a/slides/decks/L07-errors.pptx
+++ b/slides/decks/L07-errors.pptx
@@ -118,13 +118,13 @@
   <p:extLst>
     <p:ext uri="{521415D9-36F7-43E2-AB2F-B90AF26B5E84}">
       <p14:sectionLst xmlns:p14="http://schemas.microsoft.com/office/powerpoint/2010/main">
-        <p14:section name="开场" id="{e5eb9f60-40b4-c4e2-9560-063a49afaf9b}">
+        <p14:section name="开场" id="{da767e22-72fb-ee20-e2fa-91332e571578}">
           <p14:sldIdLst>
             <p14:sldId id="256"/>
             <p14:sldId id="257"/>
           </p14:sldIdLst>
         </p14:section>
-        <p14:section name="讲解" id="{1cf6eda3-2a4f-cd34-0d09-40b49355f91e}">
+        <p14:section name="讲解" id="{aa8d37d1-8548-c1ba-f56f-6cb9fe7591d6}">
           <p14:sldIdLst>
             <p14:sldId id="258"/>
             <p14:sldId id="259"/>
@@ -135,13 +135,13 @@
             <p14:sldId id="264"/>
           </p14:sldIdLst>
         </p14:section>
-        <p14:section name="练习" id="{c512977f-a193-c5a0-aa38-60e262d70407}">
+        <p14:section name="练习" id="{86b4bfaf-e5a5-e1e2-31cb-c6eafd0126cd}">
           <p14:sldIdLst>
             <p14:sldId id="265"/>
             <p14:sldId id="266"/>
           </p14:sldIdLst>
         </p14:section>
-        <p14:section name="收束" id="{79d57f48-4078-f339-ff0c-f18fbc2ac6b5}">
+        <p14:section name="收束" id="{b57de59a-9b00-e89a-b4d8-35424e63d71e}">
           <p14:sldIdLst>
             <p14:sldId id="267"/>
           </p14:sldIdLst>
